--- a/00-Documentazione/Linguaggio-C-03-Le-Funzioni.pptx
+++ b/00-Documentazione/Linguaggio-C-03-Le-Funzioni.pptx
@@ -4803,7 +4803,7 @@
         </p:nvSpPr>
         <p:spPr>
           <a:xfrm>
-            <a:off x="609585" y="1517145"/>
+            <a:off x="609585" y="632411"/>
             <a:ext cx="10972526" cy="446980"/>
           </a:xfrm>
           <a:prstGeom prst="rect">
@@ -4845,7 +4845,7 @@
         </p:nvSpPr>
         <p:spPr>
           <a:xfrm>
-            <a:off x="609585" y="2128322"/>
+            <a:off x="609585" y="1243588"/>
             <a:ext cx="5689458" cy="497681"/>
           </a:xfrm>
           <a:prstGeom prst="rect">
@@ -4889,7 +4889,7 @@
         </p:nvSpPr>
         <p:spPr>
           <a:xfrm>
-            <a:off x="609585" y="2816820"/>
+            <a:off x="609585" y="1932087"/>
             <a:ext cx="5689458" cy="2346821"/>
           </a:xfrm>
           <a:prstGeom prst="roundRect">
@@ -4911,7 +4911,7 @@
         </p:nvSpPr>
         <p:spPr>
           <a:xfrm>
-            <a:off x="822900" y="2994938"/>
+            <a:off x="822900" y="2110204"/>
             <a:ext cx="5262828" cy="1991221"/>
           </a:xfrm>
           <a:prstGeom prst="rect">
@@ -5071,7 +5071,7 @@
           </p:nvPr>
         </p:nvGraphicFramePr>
         <p:xfrm>
-          <a:off x="6603736" y="2119114"/>
+          <a:off x="6603736" y="1234380"/>
           <a:ext cx="4978375" cy="914400"/>
         </p:xfrm>
         <a:graphic>
@@ -5686,7 +5686,7 @@
         </p:nvSpPr>
         <p:spPr>
           <a:xfrm>
-            <a:off x="6603736" y="3980061"/>
+            <a:off x="6603736" y="3095327"/>
             <a:ext cx="4978375" cy="1191022"/>
           </a:xfrm>
           <a:prstGeom prst="roundRect">
@@ -5716,7 +5716,7 @@
         </p:blipFill>
         <p:spPr>
           <a:xfrm>
-            <a:off x="6781531" y="4237236"/>
+            <a:off x="6781531" y="3352502"/>
             <a:ext cx="222244" cy="177800"/>
           </a:xfrm>
           <a:prstGeom prst="rect">
@@ -5732,7 +5732,7 @@
         </p:nvSpPr>
         <p:spPr>
           <a:xfrm>
-            <a:off x="7181571" y="4211519"/>
+            <a:off x="7181571" y="3326785"/>
             <a:ext cx="4222744" cy="746522"/>
           </a:xfrm>
           <a:prstGeom prst="rect">
@@ -15477,7 +15477,7 @@
         </p:nvSpPr>
         <p:spPr>
           <a:xfrm>
-            <a:off x="609585" y="1737380"/>
+            <a:off x="609585" y="615315"/>
             <a:ext cx="11582110" cy="186630"/>
           </a:xfrm>
           <a:prstGeom prst="rect">
@@ -15519,7 +15519,7 @@
         </p:nvSpPr>
         <p:spPr>
           <a:xfrm>
-            <a:off x="609585" y="2014132"/>
+            <a:off x="609585" y="892067"/>
             <a:ext cx="10972526" cy="446980"/>
           </a:xfrm>
           <a:prstGeom prst="rect">
@@ -15561,7 +15561,7 @@
         </p:nvSpPr>
         <p:spPr>
           <a:xfrm>
-            <a:off x="609585" y="2625308"/>
+            <a:off x="609585" y="1503244"/>
             <a:ext cx="11582110" cy="248841"/>
           </a:xfrm>
           <a:prstGeom prst="rect">
@@ -15603,7 +15603,7 @@
         </p:nvSpPr>
         <p:spPr>
           <a:xfrm>
-            <a:off x="609585" y="3017341"/>
+            <a:off x="609585" y="1895277"/>
             <a:ext cx="3454314" cy="2108994"/>
           </a:xfrm>
           <a:prstGeom prst="roundRect">
@@ -15625,7 +15625,7 @@
         </p:nvSpPr>
         <p:spPr>
           <a:xfrm>
-            <a:off x="787380" y="3220541"/>
+            <a:off x="787380" y="2098477"/>
             <a:ext cx="3098722" cy="1453753"/>
           </a:xfrm>
           <a:prstGeom prst="rect">
@@ -15750,7 +15750,7 @@
         </p:nvSpPr>
         <p:spPr>
           <a:xfrm>
-            <a:off x="4368691" y="3017341"/>
+            <a:off x="4368691" y="1895277"/>
             <a:ext cx="3454314" cy="2108994"/>
           </a:xfrm>
           <a:prstGeom prst="roundRect">
@@ -15772,7 +15772,7 @@
         </p:nvSpPr>
         <p:spPr>
           <a:xfrm>
-            <a:off x="4546486" y="3220541"/>
+            <a:off x="4546486" y="2098477"/>
             <a:ext cx="3098722" cy="1702594"/>
           </a:xfrm>
           <a:prstGeom prst="rect">
@@ -15897,7 +15897,7 @@
         </p:nvSpPr>
         <p:spPr>
           <a:xfrm>
-            <a:off x="8127797" y="3017341"/>
+            <a:off x="8127797" y="1895277"/>
             <a:ext cx="3454314" cy="2108994"/>
           </a:xfrm>
           <a:prstGeom prst="roundRect">
@@ -15919,7 +15919,7 @@
         </p:nvSpPr>
         <p:spPr>
           <a:xfrm>
-            <a:off x="8305592" y="3220541"/>
+            <a:off x="8305592" y="2098477"/>
             <a:ext cx="3098722" cy="1453753"/>
           </a:xfrm>
           <a:prstGeom prst="rect">
@@ -18291,7 +18291,7 @@
         </p:nvSpPr>
         <p:spPr>
           <a:xfrm>
-            <a:off x="609585" y="1054786"/>
+            <a:off x="609585" y="632411"/>
             <a:ext cx="10972526" cy="446980"/>
           </a:xfrm>
           <a:prstGeom prst="rect">
@@ -18333,7 +18333,7 @@
         </p:nvSpPr>
         <p:spPr>
           <a:xfrm>
-            <a:off x="609585" y="1856780"/>
+            <a:off x="609585" y="1434405"/>
             <a:ext cx="5689458" cy="3769122"/>
           </a:xfrm>
           <a:prstGeom prst="roundRect">
@@ -18355,7 +18355,7 @@
         </p:nvSpPr>
         <p:spPr>
           <a:xfrm>
-            <a:off x="822900" y="2034897"/>
+            <a:off x="822900" y="1612523"/>
             <a:ext cx="5262828" cy="3413522"/>
           </a:xfrm>
           <a:prstGeom prst="rect">
@@ -18608,7 +18608,7 @@
         </p:nvSpPr>
         <p:spPr>
           <a:xfrm>
-            <a:off x="6603736" y="1665962"/>
+            <a:off x="6603736" y="1243588"/>
             <a:ext cx="4978375" cy="497681"/>
           </a:xfrm>
           <a:prstGeom prst="rect">
@@ -18652,7 +18652,7 @@
         </p:nvSpPr>
         <p:spPr>
           <a:xfrm>
-            <a:off x="6603736" y="2259211"/>
+            <a:off x="6603736" y="1836837"/>
             <a:ext cx="4978375" cy="1039812"/>
           </a:xfrm>
           <a:prstGeom prst="rect">
@@ -18718,7 +18718,7 @@
         </p:nvSpPr>
         <p:spPr>
           <a:xfrm>
-            <a:off x="6603736" y="3426023"/>
+            <a:off x="6603736" y="3003649"/>
             <a:ext cx="4978375" cy="1191022"/>
           </a:xfrm>
           <a:prstGeom prst="roundRect">
@@ -18748,7 +18748,7 @@
         </p:blipFill>
         <p:spPr>
           <a:xfrm>
-            <a:off x="6781531" y="3683198"/>
+            <a:off x="6781531" y="3260824"/>
             <a:ext cx="222244" cy="177800"/>
           </a:xfrm>
           <a:prstGeom prst="rect">
@@ -18764,7 +18764,7 @@
         </p:nvSpPr>
         <p:spPr>
           <a:xfrm>
-            <a:off x="7181571" y="3657481"/>
+            <a:off x="7181571" y="3235107"/>
             <a:ext cx="4222744" cy="746522"/>
           </a:xfrm>
           <a:prstGeom prst="rect">
@@ -20370,7 +20370,7 @@
         </p:nvSpPr>
         <p:spPr>
           <a:xfrm>
-            <a:off x="609585" y="1481525"/>
+            <a:off x="609585" y="632411"/>
             <a:ext cx="10972526" cy="446980"/>
           </a:xfrm>
           <a:prstGeom prst="rect">
@@ -20412,7 +20412,7 @@
         </p:nvSpPr>
         <p:spPr>
           <a:xfrm>
-            <a:off x="609585" y="2283520"/>
+            <a:off x="609585" y="1434405"/>
             <a:ext cx="6045049" cy="2915741"/>
           </a:xfrm>
           <a:prstGeom prst="roundRect">
@@ -20434,7 +20434,7 @@
         </p:nvSpPr>
         <p:spPr>
           <a:xfrm>
-            <a:off x="822900" y="2461637"/>
+            <a:off x="822900" y="1612523"/>
             <a:ext cx="5618419" cy="2560141"/>
           </a:xfrm>
           <a:prstGeom prst="rect">
@@ -20607,7 +20607,7 @@
         </p:nvSpPr>
         <p:spPr>
           <a:xfrm>
-            <a:off x="6959327" y="2083495"/>
+            <a:off x="6959327" y="1234380"/>
             <a:ext cx="4622784" cy="1537494"/>
           </a:xfrm>
           <a:prstGeom prst="rect">
@@ -20673,7 +20673,7 @@
         </p:nvSpPr>
         <p:spPr>
           <a:xfrm>
-            <a:off x="6959327" y="3773388"/>
+            <a:off x="6959327" y="2924274"/>
             <a:ext cx="4622784" cy="1191022"/>
           </a:xfrm>
           <a:prstGeom prst="roundRect">
@@ -20703,7 +20703,7 @@
         </p:blipFill>
         <p:spPr>
           <a:xfrm>
-            <a:off x="7137122" y="4030563"/>
+            <a:off x="7137122" y="3181449"/>
             <a:ext cx="222244" cy="177800"/>
           </a:xfrm>
           <a:prstGeom prst="rect">
@@ -20719,7 +20719,7 @@
         </p:nvSpPr>
         <p:spPr>
           <a:xfrm>
-            <a:off x="7537162" y="4004846"/>
+            <a:off x="7537162" y="3155732"/>
             <a:ext cx="3867152" cy="746522"/>
           </a:xfrm>
           <a:prstGeom prst="rect">
@@ -20861,7 +20861,7 @@
         </p:nvSpPr>
         <p:spPr>
           <a:xfrm>
-            <a:off x="609585" y="1677185"/>
+            <a:off x="609585" y="632411"/>
             <a:ext cx="10972526" cy="446980"/>
           </a:xfrm>
           <a:prstGeom prst="rect">
@@ -20903,7 +20903,7 @@
         </p:nvSpPr>
         <p:spPr>
           <a:xfrm>
-            <a:off x="609585" y="2288361"/>
+            <a:off x="609585" y="1243588"/>
             <a:ext cx="5333867" cy="746522"/>
           </a:xfrm>
           <a:prstGeom prst="rect">
@@ -20947,7 +20947,7 @@
         </p:nvSpPr>
         <p:spPr>
           <a:xfrm>
-            <a:off x="609585" y="3225701"/>
+            <a:off x="609585" y="2180927"/>
             <a:ext cx="5333867" cy="1777901"/>
           </a:xfrm>
           <a:prstGeom prst="roundRect">
@@ -20969,7 +20969,7 @@
         </p:nvSpPr>
         <p:spPr>
           <a:xfrm>
-            <a:off x="822900" y="3403818"/>
+            <a:off x="822900" y="2359045"/>
             <a:ext cx="4907237" cy="1422301"/>
           </a:xfrm>
           <a:prstGeom prst="rect">
@@ -21089,7 +21089,7 @@
           </p:nvPr>
         </p:nvGraphicFramePr>
         <p:xfrm>
-          <a:off x="6248244" y="2279154"/>
+          <a:off x="6248244" y="1234380"/>
           <a:ext cx="5333867" cy="914400"/>
         </p:xfrm>
         <a:graphic>
@@ -21704,7 +21704,7 @@
         </p:nvSpPr>
         <p:spPr>
           <a:xfrm>
-            <a:off x="6248244" y="3891260"/>
+            <a:off x="6248244" y="2846487"/>
             <a:ext cx="5333867" cy="1191022"/>
           </a:xfrm>
           <a:prstGeom prst="roundRect">
@@ -21734,7 +21734,7 @@
         </p:blipFill>
         <p:spPr>
           <a:xfrm>
-            <a:off x="6426039" y="4148435"/>
+            <a:off x="6426039" y="3103662"/>
             <a:ext cx="222244" cy="177800"/>
           </a:xfrm>
           <a:prstGeom prst="rect">
@@ -21750,7 +21750,7 @@
         </p:nvSpPr>
         <p:spPr>
           <a:xfrm>
-            <a:off x="6826079" y="4122718"/>
+            <a:off x="6826079" y="3077944"/>
             <a:ext cx="4578235" cy="746522"/>
           </a:xfrm>
           <a:prstGeom prst="rect">
